--- a/presentation/_PQC-Navy 템플릿.pptx
+++ b/presentation/_PQC-Navy 템플릿.pptx
@@ -3829,7 +3829,7 @@
               <a:lnSpc>
                 <a:spcPct val="150000"/>
               </a:lnSpc>
-              <a:defRPr sz="1800" b="0"/>
+              <a:defRPr sz="1800"/>
             </a:lvl1pPr>
             <a:lvl2pPr>
               <a:lnSpc>
@@ -9252,7 +9252,7 @@
         <a:buNone/>
         <a:defRPr sz="2800" b="0" kern="1200" spc="-30">
           <a:solidFill>
-            <a:schemeClr val="tx1"/>
+            <a:srgbClr val="0F2540"/>
           </a:solidFill>
           <a:latin typeface="+mj-lt"/>
           <a:ea typeface="+mj-ea"/>
@@ -9580,7 +9580,7 @@
   <a:themeElements>
     <a:clrScheme name="PQC Navy">
       <a:dk1>
-        <a:srgbClr val="0F2540"/>
+        <a:srgbClr val="000000"/>
       </a:dk1>
       <a:lt1>
         <a:srgbClr val="FFFFFF"/>
@@ -9618,7 +9618,7 @@
     </a:clrScheme>
     <a:fontScheme name="PQC">
       <a:majorFont>
-        <a:latin typeface="Segoe UI" panose="020B0502040204020203"/>
+        <a:latin typeface="맑은 고딕" panose="020B0503020000020004"/>
         <a:ea typeface=""/>
         <a:cs typeface=""/>
         <a:font script="Jpan" typeface="游ゴシック Light"/>
@@ -9670,7 +9670,7 @@
         <a:font script="Tfng" typeface="Ebrima"/>
       </a:majorFont>
       <a:minorFont>
-        <a:latin typeface="Segoe UI" panose="020B0502040204020203"/>
+        <a:latin typeface="맑은 고딕" panose="020B0503020000020004"/>
         <a:ea typeface=""/>
         <a:cs typeface=""/>
         <a:font script="Jpan" typeface="游ゴシック"/>

--- a/presentation/_PQC-Navy 템플릿.pptx
+++ b/presentation/_PQC-Navy 템플릿.pptx
@@ -9271,9 +9271,9 @@
         <a:buClr>
           <a:srgbClr val="2EC4D9"/>
         </a:buClr>
-        <a:buSzPct val="85000"/>
+        <a:buSzPct val="80000"/>
         <a:buFont typeface="Arial" panose="020B0604020202020204" pitchFamily="34" charset="0"/>
-        <a:buChar char="▪"/>
+        <a:buChar char="●"/>
         <a:defRPr sz="2800" kern="1200">
           <a:solidFill>
             <a:schemeClr val="tx1"/>
@@ -9293,9 +9293,9 @@
         <a:buClr>
           <a:srgbClr val="5A7A96"/>
         </a:buClr>
-        <a:buSzPct val="100000"/>
+        <a:buSzPct val="110000"/>
         <a:buFont typeface="Arial" panose="020B0604020202020204" pitchFamily="34" charset="0"/>
-        <a:buChar char="–"/>
+        <a:buChar char="○"/>
         <a:defRPr sz="2400" kern="1200">
           <a:solidFill>
             <a:schemeClr val="tx1">
